--- a/S_Korea_Aquaculture_Yearly_Prediction.pptx
+++ b/S_Korea_Aquaculture_Yearly_Prediction.pptx
@@ -8,6 +8,12 @@
     <p:sldId id="256" r:id="rId2"/>
     <p:sldId id="257" r:id="rId3"/>
     <p:sldId id="258" r:id="rId4"/>
+    <p:sldId id="259" r:id="rId5"/>
+    <p:sldId id="260" r:id="rId6"/>
+    <p:sldId id="261" r:id="rId7"/>
+    <p:sldId id="262" r:id="rId8"/>
+    <p:sldId id="263" r:id="rId9"/>
+    <p:sldId id="264" r:id="rId10"/>
   </p:sldIdLst>
   <p:sldSz cx="12192000" cy="6858000"/>
   <p:notesSz cx="6858000" cy="9144000"/>
@@ -6148,13 +6154,21 @@
             <p:ph type="title"/>
           </p:nvPr>
         </p:nvSpPr>
-        <p:spPr/>
-        <p:txBody>
-          <a:bodyPr/>
-          <a:lstStyle/>
-          <a:p>
-            <a:r>
-              <a:rPr lang="en-US" dirty="0"/>
+        <p:spPr>
+          <a:xfrm>
+            <a:off x="2273911" y="547079"/>
+            <a:ext cx="4558338" cy="1596177"/>
+          </a:xfrm>
+        </p:spPr>
+        <p:txBody>
+          <a:bodyPr>
+            <a:normAutofit/>
+          </a:bodyPr>
+          <a:lstStyle/>
+          <a:p>
+            <a:pPr algn="l"/>
+            <a:r>
+              <a:rPr lang="en-US" sz="3200" dirty="0"/>
               <a:t>STUDY FRAMEWORK</a:t>
             </a:r>
           </a:p>
@@ -6162,26 +6176,111 @@
       </p:sp>
       <p:sp>
         <p:nvSpPr>
-          <p:cNvPr id="3" name="Content Placeholder 2">
+          <p:cNvPr id="6" name="TextBox 5">
             <a:extLst>
               <a:ext uri="{FF2B5EF4-FFF2-40B4-BE49-F238E27FC236}">
-                <a16:creationId xmlns:a16="http://schemas.microsoft.com/office/drawing/2014/main" id="{C11BA805-8A54-9A4C-AFE5-A1A8C213151E}"/>
+                <a16:creationId xmlns:a16="http://schemas.microsoft.com/office/drawing/2014/main" id="{8080B130-E948-3B4E-95E3-964C6F92B2C8}"/>
               </a:ext>
             </a:extLst>
           </p:cNvPr>
-          <p:cNvSpPr>
-            <a:spLocks noGrp="1"/>
-          </p:cNvSpPr>
-          <p:nvPr>
-            <p:ph sz="quarter" idx="13"/>
-          </p:nvPr>
-        </p:nvSpPr>
-        <p:spPr/>
-        <p:txBody>
-          <a:bodyPr/>
-          <a:lstStyle/>
-          <a:p>
-            <a:endParaRPr lang="en-US"/>
+          <p:cNvSpPr txBox="1"/>
+          <p:nvPr/>
+        </p:nvSpPr>
+        <p:spPr>
+          <a:xfrm>
+            <a:off x="2273911" y="1971806"/>
+            <a:ext cx="8344207" cy="3416320"/>
+          </a:xfrm>
+          <a:prstGeom prst="rect">
+            <a:avLst/>
+          </a:prstGeom>
+          <a:noFill/>
+        </p:spPr>
+        <p:txBody>
+          <a:bodyPr wrap="none" rtlCol="0" anchor="ctr">
+            <a:spAutoFit/>
+          </a:bodyPr>
+          <a:lstStyle/>
+          <a:p>
+            <a:pPr marL="342900" indent="-342900">
+              <a:buAutoNum type="arabicPeriod"/>
+            </a:pPr>
+            <a:r>
+              <a:rPr lang="en-US" sz="2400" dirty="0"/>
+              <a:t>Clean the data and observe a trend over time</a:t>
+            </a:r>
+          </a:p>
+          <a:p>
+            <a:pPr marL="342900" indent="-342900">
+              <a:buAutoNum type="arabicPeriod"/>
+            </a:pPr>
+            <a:r>
+              <a:rPr lang="en-US" sz="2400" dirty="0"/>
+              <a:t>Decompose the time series observations</a:t>
+            </a:r>
+          </a:p>
+          <a:p>
+            <a:pPr marL="342900" indent="-342900">
+              <a:buAutoNum type="arabicPeriod"/>
+            </a:pPr>
+            <a:r>
+              <a:rPr lang="en-US" sz="2400" dirty="0"/>
+              <a:t>Split the data into the training and test periods</a:t>
+            </a:r>
+          </a:p>
+          <a:p>
+            <a:pPr marL="342900" indent="-342900">
+              <a:buAutoNum type="arabicPeriod"/>
+            </a:pPr>
+            <a:r>
+              <a:rPr lang="en-US" sz="2400" dirty="0"/>
+              <a:t>Check the stationarity of the training data </a:t>
+            </a:r>
+          </a:p>
+          <a:p>
+            <a:pPr marL="342900" indent="-342900">
+              <a:buAutoNum type="arabicPeriod"/>
+            </a:pPr>
+            <a:r>
+              <a:rPr lang="en-US" sz="2400" dirty="0"/>
+              <a:t>Run ACF and PACF to decide inputs for AR and MA</a:t>
+            </a:r>
+          </a:p>
+          <a:p>
+            <a:pPr marL="342900" indent="-342900">
+              <a:buAutoNum type="arabicPeriod"/>
+            </a:pPr>
+            <a:r>
+              <a:rPr lang="en-US" sz="2400" dirty="0"/>
+              <a:t>Build ARIMA models</a:t>
+            </a:r>
+          </a:p>
+          <a:p>
+            <a:pPr marL="342900" indent="-342900">
+              <a:buAutoNum type="arabicPeriod"/>
+            </a:pPr>
+            <a:r>
+              <a:rPr lang="en-US" sz="2400" dirty="0"/>
+              <a:t>Build a rolling forecast model </a:t>
+            </a:r>
+          </a:p>
+          <a:p>
+            <a:pPr marL="342900" indent="-342900">
+              <a:buAutoNum type="arabicPeriod"/>
+            </a:pPr>
+            <a:r>
+              <a:rPr lang="en-US" sz="2400" dirty="0"/>
+              <a:t>Forecast the fish production over the test period</a:t>
+            </a:r>
+          </a:p>
+          <a:p>
+            <a:pPr marL="342900" indent="-342900">
+              <a:buAutoNum type="arabicPeriod"/>
+            </a:pPr>
+            <a:r>
+              <a:rPr lang="en-US" sz="2400" dirty="0"/>
+              <a:t>Compare the forecasts from the models and actual observations</a:t>
+            </a:r>
           </a:p>
         </p:txBody>
       </p:sp>
@@ -6238,11 +6337,13 @@
           </a:xfrm>
         </p:spPr>
         <p:txBody>
-          <a:bodyPr/>
-          <a:lstStyle/>
-          <a:p>
-            <a:r>
-              <a:rPr lang="en-US" dirty="0"/>
+          <a:bodyPr>
+            <a:normAutofit/>
+          </a:bodyPr>
+          <a:lstStyle/>
+          <a:p>
+            <a:r>
+              <a:rPr lang="en-US" sz="3200" dirty="0"/>
               <a:t>S. Korea yearly aquaculture production</a:t>
             </a:r>
           </a:p>
@@ -6282,6 +6383,894 @@
     <p:extLst>
       <p:ext uri="{BB962C8B-B14F-4D97-AF65-F5344CB8AC3E}">
         <p14:creationId xmlns:p14="http://schemas.microsoft.com/office/powerpoint/2010/main" val="4252386126"/>
+      </p:ext>
+    </p:extLst>
+  </p:cSld>
+  <p:clrMapOvr>
+    <a:masterClrMapping/>
+  </p:clrMapOvr>
+</p:sld>
+</file>
+
+<file path=ppt/slides/slide4.xml><?xml version="1.0" encoding="utf-8"?>
+<p:sld xmlns:a="http://schemas.openxmlformats.org/drawingml/2006/main" xmlns:r="http://schemas.openxmlformats.org/officeDocument/2006/relationships" xmlns:p="http://schemas.openxmlformats.org/presentationml/2006/main">
+  <p:cSld>
+    <p:spTree>
+      <p:nvGrpSpPr>
+        <p:cNvPr id="1" name=""/>
+        <p:cNvGrpSpPr/>
+        <p:nvPr/>
+      </p:nvGrpSpPr>
+      <p:grpSpPr>
+        <a:xfrm>
+          <a:off x="0" y="0"/>
+          <a:ext cx="0" cy="0"/>
+          <a:chOff x="0" y="0"/>
+          <a:chExt cx="0" cy="0"/>
+        </a:xfrm>
+      </p:grpSpPr>
+      <p:sp>
+        <p:nvSpPr>
+          <p:cNvPr id="2" name="Title 1">
+            <a:extLst>
+              <a:ext uri="{FF2B5EF4-FFF2-40B4-BE49-F238E27FC236}">
+                <a16:creationId xmlns:a16="http://schemas.microsoft.com/office/drawing/2014/main" id="{732FA4C8-C2B6-0745-99AD-A8B40AA6894F}"/>
+              </a:ext>
+            </a:extLst>
+          </p:cNvPr>
+          <p:cNvSpPr>
+            <a:spLocks noGrp="1"/>
+          </p:cNvSpPr>
+          <p:nvPr>
+            <p:ph type="title"/>
+          </p:nvPr>
+        </p:nvSpPr>
+        <p:spPr>
+          <a:xfrm>
+            <a:off x="913775" y="447067"/>
+            <a:ext cx="10364451" cy="1596177"/>
+          </a:xfrm>
+        </p:spPr>
+        <p:txBody>
+          <a:bodyPr>
+            <a:normAutofit/>
+          </a:bodyPr>
+          <a:lstStyle/>
+          <a:p>
+            <a:r>
+              <a:rPr lang="en-US" sz="3200" dirty="0"/>
+              <a:t>Training(1960-2011) and test (2012-2019) periods</a:t>
+            </a:r>
+          </a:p>
+        </p:txBody>
+      </p:sp>
+      <p:pic>
+        <p:nvPicPr>
+          <p:cNvPr id="4" name="Picture 3">
+            <a:extLst>
+              <a:ext uri="{FF2B5EF4-FFF2-40B4-BE49-F238E27FC236}">
+                <a16:creationId xmlns:a16="http://schemas.microsoft.com/office/drawing/2014/main" id="{56266FF9-E9F6-9441-A5C1-5210BEDC9AD1}"/>
+              </a:ext>
+            </a:extLst>
+          </p:cNvPr>
+          <p:cNvPicPr>
+            <a:picLocks noChangeAspect="1"/>
+          </p:cNvPicPr>
+          <p:nvPr/>
+        </p:nvPicPr>
+        <p:blipFill>
+          <a:blip r:embed="rId2"/>
+          <a:stretch>
+            <a:fillRect/>
+          </a:stretch>
+        </p:blipFill>
+        <p:spPr>
+          <a:xfrm>
+            <a:off x="1104288" y="1819274"/>
+            <a:ext cx="10173938" cy="4338638"/>
+          </a:xfrm>
+          <a:prstGeom prst="rect">
+            <a:avLst/>
+          </a:prstGeom>
+        </p:spPr>
+      </p:pic>
+    </p:spTree>
+    <p:extLst>
+      <p:ext uri="{BB962C8B-B14F-4D97-AF65-F5344CB8AC3E}">
+        <p14:creationId xmlns:p14="http://schemas.microsoft.com/office/powerpoint/2010/main" val="1669161044"/>
+      </p:ext>
+    </p:extLst>
+  </p:cSld>
+  <p:clrMapOvr>
+    <a:masterClrMapping/>
+  </p:clrMapOvr>
+</p:sld>
+</file>
+
+<file path=ppt/slides/slide5.xml><?xml version="1.0" encoding="utf-8"?>
+<p:sld xmlns:a="http://schemas.openxmlformats.org/drawingml/2006/main" xmlns:r="http://schemas.openxmlformats.org/officeDocument/2006/relationships" xmlns:p="http://schemas.openxmlformats.org/presentationml/2006/main">
+  <p:cSld>
+    <p:spTree>
+      <p:nvGrpSpPr>
+        <p:cNvPr id="1" name=""/>
+        <p:cNvGrpSpPr/>
+        <p:nvPr/>
+      </p:nvGrpSpPr>
+      <p:grpSpPr>
+        <a:xfrm>
+          <a:off x="0" y="0"/>
+          <a:ext cx="0" cy="0"/>
+          <a:chOff x="0" y="0"/>
+          <a:chExt cx="0" cy="0"/>
+        </a:xfrm>
+      </p:grpSpPr>
+      <p:sp>
+        <p:nvSpPr>
+          <p:cNvPr id="2" name="Title 1">
+            <a:extLst>
+              <a:ext uri="{FF2B5EF4-FFF2-40B4-BE49-F238E27FC236}">
+                <a16:creationId xmlns:a16="http://schemas.microsoft.com/office/drawing/2014/main" id="{0F5F275F-A3A3-2746-8552-B1ABEB573F2E}"/>
+              </a:ext>
+            </a:extLst>
+          </p:cNvPr>
+          <p:cNvSpPr>
+            <a:spLocks noGrp="1"/>
+          </p:cNvSpPr>
+          <p:nvPr>
+            <p:ph type="title"/>
+          </p:nvPr>
+        </p:nvSpPr>
+        <p:spPr>
+          <a:xfrm>
+            <a:off x="913775" y="915293"/>
+            <a:ext cx="10364451" cy="727770"/>
+          </a:xfrm>
+        </p:spPr>
+        <p:txBody>
+          <a:bodyPr anchor="t">
+            <a:normAutofit/>
+          </a:bodyPr>
+          <a:lstStyle/>
+          <a:p>
+            <a:pPr algn="l"/>
+            <a:r>
+              <a:rPr lang="en-US" sz="3200" dirty="0"/>
+              <a:t>Stationarity test </a:t>
+            </a:r>
+          </a:p>
+        </p:txBody>
+      </p:sp>
+      <p:sp>
+        <p:nvSpPr>
+          <p:cNvPr id="4" name="TextBox 3">
+            <a:extLst>
+              <a:ext uri="{FF2B5EF4-FFF2-40B4-BE49-F238E27FC236}">
+                <a16:creationId xmlns:a16="http://schemas.microsoft.com/office/drawing/2014/main" id="{94DD8A31-3BCF-2640-A1A9-45E5A7513686}"/>
+              </a:ext>
+            </a:extLst>
+          </p:cNvPr>
+          <p:cNvSpPr txBox="1"/>
+          <p:nvPr/>
+        </p:nvSpPr>
+        <p:spPr>
+          <a:xfrm>
+            <a:off x="913775" y="1382626"/>
+            <a:ext cx="9844089" cy="646331"/>
+          </a:xfrm>
+          <a:prstGeom prst="rect">
+            <a:avLst/>
+          </a:prstGeom>
+          <a:noFill/>
+        </p:spPr>
+        <p:txBody>
+          <a:bodyPr wrap="square" rtlCol="0">
+            <a:spAutoFit/>
+          </a:bodyPr>
+          <a:lstStyle/>
+          <a:p>
+            <a:r>
+              <a:rPr lang="en-US" dirty="0"/>
+              <a:t>After one time difference operation, the Augmented Dickey-Fuller Test is passed. Using this information as the value of </a:t>
+            </a:r>
+            <a:r>
+              <a:rPr lang="en-US" i="1" dirty="0"/>
+              <a:t>d</a:t>
+            </a:r>
+            <a:r>
+              <a:rPr lang="en-US" dirty="0"/>
+              <a:t> in ARIMA model. </a:t>
+            </a:r>
+          </a:p>
+        </p:txBody>
+      </p:sp>
+      <p:pic>
+        <p:nvPicPr>
+          <p:cNvPr id="7" name="Picture 6">
+            <a:extLst>
+              <a:ext uri="{FF2B5EF4-FFF2-40B4-BE49-F238E27FC236}">
+                <a16:creationId xmlns:a16="http://schemas.microsoft.com/office/drawing/2014/main" id="{C9D20F7C-F989-764A-8DA3-2F5C1BFF4096}"/>
+              </a:ext>
+            </a:extLst>
+          </p:cNvPr>
+          <p:cNvPicPr>
+            <a:picLocks noChangeAspect="1"/>
+          </p:cNvPicPr>
+          <p:nvPr/>
+        </p:nvPicPr>
+        <p:blipFill>
+          <a:blip r:embed="rId2"/>
+          <a:stretch>
+            <a:fillRect/>
+          </a:stretch>
+        </p:blipFill>
+        <p:spPr>
+          <a:xfrm>
+            <a:off x="705019" y="3117850"/>
+            <a:ext cx="5130800" cy="3479800"/>
+          </a:xfrm>
+          <a:prstGeom prst="rect">
+            <a:avLst/>
+          </a:prstGeom>
+        </p:spPr>
+      </p:pic>
+      <p:sp>
+        <p:nvSpPr>
+          <p:cNvPr id="8" name="Title 1">
+            <a:extLst>
+              <a:ext uri="{FF2B5EF4-FFF2-40B4-BE49-F238E27FC236}">
+                <a16:creationId xmlns:a16="http://schemas.microsoft.com/office/drawing/2014/main" id="{34E835D5-C452-6145-83F4-C67BD5463166}"/>
+              </a:ext>
+            </a:extLst>
+          </p:cNvPr>
+          <p:cNvSpPr txBox="1">
+            <a:spLocks/>
+          </p:cNvSpPr>
+          <p:nvPr/>
+        </p:nvSpPr>
+        <p:spPr>
+          <a:xfrm>
+            <a:off x="913774" y="2471519"/>
+            <a:ext cx="2415213" cy="1032225"/>
+          </a:xfrm>
+          <a:prstGeom prst="rect">
+            <a:avLst/>
+          </a:prstGeom>
+        </p:spPr>
+        <p:txBody>
+          <a:bodyPr vert="horz" lIns="91440" tIns="45720" rIns="91440" bIns="45720" rtlCol="0" anchor="t">
+            <a:normAutofit fontScale="97500"/>
+          </a:bodyPr>
+          <a:lstStyle>
+            <a:lvl1pPr algn="ctr" defTabSz="914400" rtl="0" eaLnBrk="1" latinLnBrk="0" hangingPunct="1">
+              <a:lnSpc>
+                <a:spcPct val="90000"/>
+              </a:lnSpc>
+              <a:spcBef>
+                <a:spcPct val="0"/>
+              </a:spcBef>
+              <a:buNone/>
+              <a:defRPr sz="3600" kern="1200" cap="all" baseline="0">
+                <a:solidFill>
+                  <a:schemeClr val="tx1"/>
+                </a:solidFill>
+                <a:effectLst/>
+                <a:latin typeface="+mj-lt"/>
+                <a:ea typeface="+mj-ea"/>
+                <a:cs typeface="+mj-cs"/>
+              </a:defRPr>
+            </a:lvl1pPr>
+          </a:lstStyle>
+          <a:p>
+            <a:pPr algn="l"/>
+            <a:r>
+              <a:rPr lang="en-US" sz="3200" dirty="0"/>
+              <a:t>ACF Test</a:t>
+            </a:r>
+          </a:p>
+        </p:txBody>
+      </p:sp>
+      <p:pic>
+        <p:nvPicPr>
+          <p:cNvPr id="9" name="Picture 8">
+            <a:extLst>
+              <a:ext uri="{FF2B5EF4-FFF2-40B4-BE49-F238E27FC236}">
+                <a16:creationId xmlns:a16="http://schemas.microsoft.com/office/drawing/2014/main" id="{B0DCD785-8534-5446-9BA4-FAECCD16BAC6}"/>
+              </a:ext>
+            </a:extLst>
+          </p:cNvPr>
+          <p:cNvPicPr>
+            <a:picLocks noChangeAspect="1"/>
+          </p:cNvPicPr>
+          <p:nvPr/>
+        </p:nvPicPr>
+        <p:blipFill>
+          <a:blip r:embed="rId3"/>
+          <a:stretch>
+            <a:fillRect/>
+          </a:stretch>
+        </p:blipFill>
+        <p:spPr>
+          <a:xfrm>
+            <a:off x="6345238" y="3117850"/>
+            <a:ext cx="5130800" cy="3479800"/>
+          </a:xfrm>
+          <a:prstGeom prst="rect">
+            <a:avLst/>
+          </a:prstGeom>
+        </p:spPr>
+      </p:pic>
+      <p:sp>
+        <p:nvSpPr>
+          <p:cNvPr id="10" name="Title 1">
+            <a:extLst>
+              <a:ext uri="{FF2B5EF4-FFF2-40B4-BE49-F238E27FC236}">
+                <a16:creationId xmlns:a16="http://schemas.microsoft.com/office/drawing/2014/main" id="{197D0957-27A8-2843-91F4-E4F7DCC75755}"/>
+              </a:ext>
+            </a:extLst>
+          </p:cNvPr>
+          <p:cNvSpPr txBox="1">
+            <a:spLocks/>
+          </p:cNvSpPr>
+          <p:nvPr/>
+        </p:nvSpPr>
+        <p:spPr>
+          <a:xfrm>
+            <a:off x="6345238" y="2498289"/>
+            <a:ext cx="2584450" cy="1473636"/>
+          </a:xfrm>
+          <a:prstGeom prst="rect">
+            <a:avLst/>
+          </a:prstGeom>
+        </p:spPr>
+        <p:txBody>
+          <a:bodyPr vert="horz" lIns="91440" tIns="45720" rIns="91440" bIns="45720" rtlCol="0" anchor="t">
+            <a:normAutofit fontScale="97500"/>
+          </a:bodyPr>
+          <a:lstStyle>
+            <a:lvl1pPr algn="ctr" defTabSz="914400" rtl="0" eaLnBrk="1" latinLnBrk="0" hangingPunct="1">
+              <a:lnSpc>
+                <a:spcPct val="90000"/>
+              </a:lnSpc>
+              <a:spcBef>
+                <a:spcPct val="0"/>
+              </a:spcBef>
+              <a:buNone/>
+              <a:defRPr sz="3600" kern="1200" cap="all" baseline="0">
+                <a:solidFill>
+                  <a:schemeClr val="tx1"/>
+                </a:solidFill>
+                <a:effectLst/>
+                <a:latin typeface="+mj-lt"/>
+                <a:ea typeface="+mj-ea"/>
+                <a:cs typeface="+mj-cs"/>
+              </a:defRPr>
+            </a:lvl1pPr>
+          </a:lstStyle>
+          <a:p>
+            <a:pPr algn="l"/>
+            <a:r>
+              <a:rPr lang="en-US" sz="3200" dirty="0"/>
+              <a:t>PACF Test</a:t>
+            </a:r>
+          </a:p>
+        </p:txBody>
+      </p:sp>
+    </p:spTree>
+    <p:extLst>
+      <p:ext uri="{BB962C8B-B14F-4D97-AF65-F5344CB8AC3E}">
+        <p14:creationId xmlns:p14="http://schemas.microsoft.com/office/powerpoint/2010/main" val="1258366232"/>
+      </p:ext>
+    </p:extLst>
+  </p:cSld>
+  <p:clrMapOvr>
+    <a:masterClrMapping/>
+  </p:clrMapOvr>
+</p:sld>
+</file>
+
+<file path=ppt/slides/slide6.xml><?xml version="1.0" encoding="utf-8"?>
+<p:sld xmlns:a="http://schemas.openxmlformats.org/drawingml/2006/main" xmlns:r="http://schemas.openxmlformats.org/officeDocument/2006/relationships" xmlns:p="http://schemas.openxmlformats.org/presentationml/2006/main">
+  <p:cSld>
+    <p:spTree>
+      <p:nvGrpSpPr>
+        <p:cNvPr id="1" name=""/>
+        <p:cNvGrpSpPr/>
+        <p:nvPr/>
+      </p:nvGrpSpPr>
+      <p:grpSpPr>
+        <a:xfrm>
+          <a:off x="0" y="0"/>
+          <a:ext cx="0" cy="0"/>
+          <a:chOff x="0" y="0"/>
+          <a:chExt cx="0" cy="0"/>
+        </a:xfrm>
+      </p:grpSpPr>
+      <p:sp>
+        <p:nvSpPr>
+          <p:cNvPr id="2" name="Title 1">
+            <a:extLst>
+              <a:ext uri="{FF2B5EF4-FFF2-40B4-BE49-F238E27FC236}">
+                <a16:creationId xmlns:a16="http://schemas.microsoft.com/office/drawing/2014/main" id="{5667CB40-96FA-B348-BBC1-869A39AC038D}"/>
+              </a:ext>
+            </a:extLst>
+          </p:cNvPr>
+          <p:cNvSpPr>
+            <a:spLocks noGrp="1"/>
+          </p:cNvSpPr>
+          <p:nvPr>
+            <p:ph type="title"/>
+          </p:nvPr>
+        </p:nvSpPr>
+        <p:spPr/>
+        <p:txBody>
+          <a:bodyPr>
+            <a:normAutofit/>
+          </a:bodyPr>
+          <a:lstStyle/>
+          <a:p>
+            <a:r>
+              <a:rPr lang="en-US" sz="3200" dirty="0"/>
+              <a:t>Build time series models</a:t>
+            </a:r>
+          </a:p>
+        </p:txBody>
+      </p:sp>
+      <p:sp>
+        <p:nvSpPr>
+          <p:cNvPr id="4" name="TextBox 3">
+            <a:extLst>
+              <a:ext uri="{FF2B5EF4-FFF2-40B4-BE49-F238E27FC236}">
+                <a16:creationId xmlns:a16="http://schemas.microsoft.com/office/drawing/2014/main" id="{C84E2A77-BE95-1244-B026-77A859312ED3}"/>
+              </a:ext>
+            </a:extLst>
+          </p:cNvPr>
+          <p:cNvSpPr txBox="1"/>
+          <p:nvPr/>
+        </p:nvSpPr>
+        <p:spPr>
+          <a:xfrm>
+            <a:off x="3467043" y="2214694"/>
+            <a:ext cx="5257914" cy="1815882"/>
+          </a:xfrm>
+          <a:prstGeom prst="rect">
+            <a:avLst/>
+          </a:prstGeom>
+          <a:noFill/>
+        </p:spPr>
+        <p:txBody>
+          <a:bodyPr wrap="none" rtlCol="0">
+            <a:spAutoFit/>
+          </a:bodyPr>
+          <a:lstStyle/>
+          <a:p>
+            <a:pPr marL="285750" indent="-285750" algn="ctr">
+              <a:buFont typeface="Arial" panose="020B0604020202020204" pitchFamily="34" charset="0"/>
+              <a:buChar char="•"/>
+            </a:pPr>
+            <a:r>
+              <a:rPr lang="en-US" sz="2800" dirty="0"/>
+              <a:t>ARIMA(0 1 0)</a:t>
+            </a:r>
+          </a:p>
+          <a:p>
+            <a:pPr marL="285750" indent="-285750" algn="ctr">
+              <a:buFont typeface="Arial" panose="020B0604020202020204" pitchFamily="34" charset="0"/>
+              <a:buChar char="•"/>
+            </a:pPr>
+            <a:r>
+              <a:rPr lang="en-US" sz="2800" dirty="0"/>
+              <a:t>ARIMA(6 1 0)</a:t>
+            </a:r>
+          </a:p>
+          <a:p>
+            <a:pPr marL="285750" indent="-285750" algn="ctr">
+              <a:buFont typeface="Arial" panose="020B0604020202020204" pitchFamily="34" charset="0"/>
+              <a:buChar char="•"/>
+            </a:pPr>
+            <a:r>
+              <a:rPr lang="en-US" sz="2800" dirty="0"/>
+              <a:t>ARIMA(15 1 0)</a:t>
+            </a:r>
+          </a:p>
+          <a:p>
+            <a:pPr marL="285750" indent="-285750" algn="ctr">
+              <a:buFont typeface="Arial" panose="020B0604020202020204" pitchFamily="34" charset="0"/>
+              <a:buChar char="•"/>
+            </a:pPr>
+            <a:r>
+              <a:rPr lang="en-US" sz="2800" dirty="0"/>
+              <a:t>Rolling forecasting original model</a:t>
+            </a:r>
+          </a:p>
+        </p:txBody>
+      </p:sp>
+    </p:spTree>
+    <p:extLst>
+      <p:ext uri="{BB962C8B-B14F-4D97-AF65-F5344CB8AC3E}">
+        <p14:creationId xmlns:p14="http://schemas.microsoft.com/office/powerpoint/2010/main" val="1704418710"/>
+      </p:ext>
+    </p:extLst>
+  </p:cSld>
+  <p:clrMapOvr>
+    <a:masterClrMapping/>
+  </p:clrMapOvr>
+</p:sld>
+</file>
+
+<file path=ppt/slides/slide7.xml><?xml version="1.0" encoding="utf-8"?>
+<p:sld xmlns:a="http://schemas.openxmlformats.org/drawingml/2006/main" xmlns:r="http://schemas.openxmlformats.org/officeDocument/2006/relationships" xmlns:p="http://schemas.openxmlformats.org/presentationml/2006/main">
+  <p:cSld>
+    <p:spTree>
+      <p:nvGrpSpPr>
+        <p:cNvPr id="1" name=""/>
+        <p:cNvGrpSpPr/>
+        <p:nvPr/>
+      </p:nvGrpSpPr>
+      <p:grpSpPr>
+        <a:xfrm>
+          <a:off x="0" y="0"/>
+          <a:ext cx="0" cy="0"/>
+          <a:chOff x="0" y="0"/>
+          <a:chExt cx="0" cy="0"/>
+        </a:xfrm>
+      </p:grpSpPr>
+      <p:sp>
+        <p:nvSpPr>
+          <p:cNvPr id="2" name="Title 1">
+            <a:extLst>
+              <a:ext uri="{FF2B5EF4-FFF2-40B4-BE49-F238E27FC236}">
+                <a16:creationId xmlns:a16="http://schemas.microsoft.com/office/drawing/2014/main" id="{61FEF0D5-74B4-CE45-9962-67A9E2FFF2AE}"/>
+              </a:ext>
+            </a:extLst>
+          </p:cNvPr>
+          <p:cNvSpPr>
+            <a:spLocks noGrp="1"/>
+          </p:cNvSpPr>
+          <p:nvPr>
+            <p:ph type="title"/>
+          </p:nvPr>
+        </p:nvSpPr>
+        <p:spPr>
+          <a:xfrm>
+            <a:off x="913774" y="475642"/>
+            <a:ext cx="10364451" cy="595921"/>
+          </a:xfrm>
+        </p:spPr>
+        <p:txBody>
+          <a:bodyPr anchor="t">
+            <a:normAutofit/>
+          </a:bodyPr>
+          <a:lstStyle/>
+          <a:p>
+            <a:r>
+              <a:rPr lang="en-US" sz="3200" dirty="0"/>
+              <a:t>Model performances comparison</a:t>
+            </a:r>
+          </a:p>
+        </p:txBody>
+      </p:sp>
+      <p:sp>
+        <p:nvSpPr>
+          <p:cNvPr id="6" name="TextBox 5">
+            <a:extLst>
+              <a:ext uri="{FF2B5EF4-FFF2-40B4-BE49-F238E27FC236}">
+                <a16:creationId xmlns:a16="http://schemas.microsoft.com/office/drawing/2014/main" id="{42627CB9-BFC8-1640-B2CA-3244B237B7CB}"/>
+              </a:ext>
+            </a:extLst>
+          </p:cNvPr>
+          <p:cNvSpPr txBox="1"/>
+          <p:nvPr/>
+        </p:nvSpPr>
+        <p:spPr>
+          <a:xfrm>
+            <a:off x="1585912" y="1057276"/>
+            <a:ext cx="9753760" cy="369332"/>
+          </a:xfrm>
+          <a:prstGeom prst="rect">
+            <a:avLst/>
+          </a:prstGeom>
+          <a:noFill/>
+        </p:spPr>
+        <p:txBody>
+          <a:bodyPr wrap="none" rtlCol="0">
+            <a:spAutoFit/>
+          </a:bodyPr>
+          <a:lstStyle/>
+          <a:p>
+            <a:r>
+              <a:rPr lang="en-US" dirty="0"/>
+              <a:t>Finding: With this data, the rolling origin forecasting based on ARIMA performs better than ARIMA itself.</a:t>
+            </a:r>
+          </a:p>
+        </p:txBody>
+      </p:sp>
+      <p:pic>
+        <p:nvPicPr>
+          <p:cNvPr id="7" name="Picture 6">
+            <a:extLst>
+              <a:ext uri="{FF2B5EF4-FFF2-40B4-BE49-F238E27FC236}">
+                <a16:creationId xmlns:a16="http://schemas.microsoft.com/office/drawing/2014/main" id="{23674156-8B9B-0846-8783-589978A2FD98}"/>
+              </a:ext>
+            </a:extLst>
+          </p:cNvPr>
+          <p:cNvPicPr>
+            <a:picLocks noChangeAspect="1"/>
+          </p:cNvPicPr>
+          <p:nvPr/>
+        </p:nvPicPr>
+        <p:blipFill>
+          <a:blip r:embed="rId2"/>
+          <a:stretch>
+            <a:fillRect/>
+          </a:stretch>
+        </p:blipFill>
+        <p:spPr>
+          <a:xfrm>
+            <a:off x="1443036" y="1426608"/>
+            <a:ext cx="9629384" cy="5021263"/>
+          </a:xfrm>
+          <a:prstGeom prst="rect">
+            <a:avLst/>
+          </a:prstGeom>
+        </p:spPr>
+      </p:pic>
+    </p:spTree>
+    <p:extLst>
+      <p:ext uri="{BB962C8B-B14F-4D97-AF65-F5344CB8AC3E}">
+        <p14:creationId xmlns:p14="http://schemas.microsoft.com/office/powerpoint/2010/main" val="665322245"/>
+      </p:ext>
+    </p:extLst>
+  </p:cSld>
+  <p:clrMapOvr>
+    <a:masterClrMapping/>
+  </p:clrMapOvr>
+</p:sld>
+</file>
+
+<file path=ppt/slides/slide8.xml><?xml version="1.0" encoding="utf-8"?>
+<p:sld xmlns:a="http://schemas.openxmlformats.org/drawingml/2006/main" xmlns:r="http://schemas.openxmlformats.org/officeDocument/2006/relationships" xmlns:p="http://schemas.openxmlformats.org/presentationml/2006/main">
+  <p:cSld>
+    <p:spTree>
+      <p:nvGrpSpPr>
+        <p:cNvPr id="1" name=""/>
+        <p:cNvGrpSpPr/>
+        <p:nvPr/>
+      </p:nvGrpSpPr>
+      <p:grpSpPr>
+        <a:xfrm>
+          <a:off x="0" y="0"/>
+          <a:ext cx="0" cy="0"/>
+          <a:chOff x="0" y="0"/>
+          <a:chExt cx="0" cy="0"/>
+        </a:xfrm>
+      </p:grpSpPr>
+      <p:sp>
+        <p:nvSpPr>
+          <p:cNvPr id="2" name="Title 1">
+            <a:extLst>
+              <a:ext uri="{FF2B5EF4-FFF2-40B4-BE49-F238E27FC236}">
+                <a16:creationId xmlns:a16="http://schemas.microsoft.com/office/drawing/2014/main" id="{E4B51F05-7A86-6B4B-9C9E-93CFA5D545B4}"/>
+              </a:ext>
+            </a:extLst>
+          </p:cNvPr>
+          <p:cNvSpPr>
+            <a:spLocks noGrp="1"/>
+          </p:cNvSpPr>
+          <p:nvPr>
+            <p:ph type="title"/>
+          </p:nvPr>
+        </p:nvSpPr>
+        <p:spPr>
+          <a:xfrm>
+            <a:off x="928063" y="162773"/>
+            <a:ext cx="10364451" cy="1596177"/>
+          </a:xfrm>
+        </p:spPr>
+        <p:txBody>
+          <a:bodyPr>
+            <a:normAutofit/>
+          </a:bodyPr>
+          <a:lstStyle/>
+          <a:p>
+            <a:r>
+              <a:rPr lang="en-US" sz="3200" dirty="0"/>
+              <a:t>Rolling origin forecasting comparison</a:t>
+            </a:r>
+          </a:p>
+        </p:txBody>
+      </p:sp>
+      <p:pic>
+        <p:nvPicPr>
+          <p:cNvPr id="6" name="Picture 5">
+            <a:extLst>
+              <a:ext uri="{FF2B5EF4-FFF2-40B4-BE49-F238E27FC236}">
+                <a16:creationId xmlns:a16="http://schemas.microsoft.com/office/drawing/2014/main" id="{D45B4B55-C009-7543-8C23-B49AA0FD7471}"/>
+              </a:ext>
+            </a:extLst>
+          </p:cNvPr>
+          <p:cNvPicPr>
+            <a:picLocks noChangeAspect="1"/>
+          </p:cNvPicPr>
+          <p:nvPr/>
+        </p:nvPicPr>
+        <p:blipFill>
+          <a:blip r:embed="rId2"/>
+          <a:stretch>
+            <a:fillRect/>
+          </a:stretch>
+        </p:blipFill>
+        <p:spPr>
+          <a:xfrm>
+            <a:off x="1246188" y="1339849"/>
+            <a:ext cx="9858598" cy="5160963"/>
+          </a:xfrm>
+          <a:prstGeom prst="rect">
+            <a:avLst/>
+          </a:prstGeom>
+        </p:spPr>
+      </p:pic>
+    </p:spTree>
+    <p:extLst>
+      <p:ext uri="{BB962C8B-B14F-4D97-AF65-F5344CB8AC3E}">
+        <p14:creationId xmlns:p14="http://schemas.microsoft.com/office/powerpoint/2010/main" val="2034165442"/>
+      </p:ext>
+    </p:extLst>
+  </p:cSld>
+  <p:clrMapOvr>
+    <a:masterClrMapping/>
+  </p:clrMapOvr>
+</p:sld>
+</file>
+
+<file path=ppt/slides/slide9.xml><?xml version="1.0" encoding="utf-8"?>
+<p:sld xmlns:a="http://schemas.openxmlformats.org/drawingml/2006/main" xmlns:r="http://schemas.openxmlformats.org/officeDocument/2006/relationships" xmlns:p="http://schemas.openxmlformats.org/presentationml/2006/main">
+  <p:cSld>
+    <p:spTree>
+      <p:nvGrpSpPr>
+        <p:cNvPr id="1" name=""/>
+        <p:cNvGrpSpPr/>
+        <p:nvPr/>
+      </p:nvGrpSpPr>
+      <p:grpSpPr>
+        <a:xfrm>
+          <a:off x="0" y="0"/>
+          <a:ext cx="0" cy="0"/>
+          <a:chOff x="0" y="0"/>
+          <a:chExt cx="0" cy="0"/>
+        </a:xfrm>
+      </p:grpSpPr>
+      <p:sp>
+        <p:nvSpPr>
+          <p:cNvPr id="6" name="TextBox 5">
+            <a:extLst>
+              <a:ext uri="{FF2B5EF4-FFF2-40B4-BE49-F238E27FC236}">
+                <a16:creationId xmlns:a16="http://schemas.microsoft.com/office/drawing/2014/main" id="{A876D4CF-146D-CB40-A6A7-E3F45EFB0AD3}"/>
+              </a:ext>
+            </a:extLst>
+          </p:cNvPr>
+          <p:cNvSpPr txBox="1"/>
+          <p:nvPr/>
+        </p:nvSpPr>
+        <p:spPr>
+          <a:xfrm>
+            <a:off x="1257300" y="1785938"/>
+            <a:ext cx="7912038" cy="2031325"/>
+          </a:xfrm>
+          <a:prstGeom prst="rect">
+            <a:avLst/>
+          </a:prstGeom>
+          <a:noFill/>
+        </p:spPr>
+        <p:txBody>
+          <a:bodyPr wrap="none" rtlCol="0">
+            <a:spAutoFit/>
+          </a:bodyPr>
+          <a:lstStyle/>
+          <a:p>
+            <a:r>
+              <a:rPr lang="en-US" dirty="0"/>
+              <a:t>Data Source: from Kaggle</a:t>
+            </a:r>
+          </a:p>
+          <a:p>
+            <a:r>
+              <a:rPr lang="en-US" dirty="0">
+                <a:hlinkClick r:id="rId2"/>
+              </a:rPr>
+              <a:t>https://</a:t>
+            </a:r>
+            <a:r>
+              <a:rPr lang="en-US" dirty="0" err="1">
+                <a:hlinkClick r:id="rId2"/>
+              </a:rPr>
+              <a:t>www.kaggle.com</a:t>
+            </a:r>
+            <a:r>
+              <a:rPr lang="en-US" dirty="0">
+                <a:hlinkClick r:id="rId2"/>
+              </a:rPr>
+              <a:t>/datasets/</a:t>
+            </a:r>
+            <a:r>
+              <a:rPr lang="en-US" dirty="0" err="1">
+                <a:hlinkClick r:id="rId2"/>
+              </a:rPr>
+              <a:t>sergegeukjian</a:t>
+            </a:r>
+            <a:r>
+              <a:rPr lang="en-US" dirty="0">
+                <a:hlinkClick r:id="rId2"/>
+              </a:rPr>
+              <a:t>/fish-and-overfishing</a:t>
+            </a:r>
+            <a:endParaRPr lang="en-US" dirty="0"/>
+          </a:p>
+          <a:p>
+            <a:endParaRPr lang="en-US" dirty="0"/>
+          </a:p>
+          <a:p>
+            <a:endParaRPr lang="en-US" dirty="0"/>
+          </a:p>
+          <a:p>
+            <a:r>
+              <a:rPr lang="en-US" dirty="0"/>
+              <a:t>Python Code:</a:t>
+            </a:r>
+          </a:p>
+          <a:p>
+            <a:r>
+              <a:rPr lang="en-US" dirty="0">
+                <a:hlinkClick r:id="rId3"/>
+              </a:rPr>
+              <a:t>https://</a:t>
+            </a:r>
+            <a:r>
+              <a:rPr lang="en-US" dirty="0" err="1">
+                <a:hlinkClick r:id="rId3"/>
+              </a:rPr>
+              <a:t>www.kaggle.com</a:t>
+            </a:r>
+            <a:r>
+              <a:rPr lang="en-US" dirty="0">
+                <a:hlinkClick r:id="rId3"/>
+              </a:rPr>
+              <a:t>/code/</a:t>
+            </a:r>
+            <a:r>
+              <a:rPr lang="en-US" dirty="0" err="1">
+                <a:hlinkClick r:id="rId3"/>
+              </a:rPr>
+              <a:t>amikang</a:t>
+            </a:r>
+            <a:r>
+              <a:rPr lang="en-US" dirty="0">
+                <a:hlinkClick r:id="rId3"/>
+              </a:rPr>
+              <a:t>/s-</a:t>
+            </a:r>
+            <a:r>
+              <a:rPr lang="en-US" dirty="0" err="1">
+                <a:hlinkClick r:id="rId3"/>
+              </a:rPr>
+              <a:t>korea</a:t>
+            </a:r>
+            <a:r>
+              <a:rPr lang="en-US" dirty="0">
+                <a:hlinkClick r:id="rId3"/>
+              </a:rPr>
+              <a:t>-aquaculture-time-series-prediction</a:t>
+            </a:r>
+            <a:endParaRPr lang="en-US" dirty="0"/>
+          </a:p>
+          <a:p>
+            <a:endParaRPr lang="en-US" dirty="0"/>
+          </a:p>
+        </p:txBody>
+      </p:sp>
+    </p:spTree>
+    <p:extLst>
+      <p:ext uri="{BB962C8B-B14F-4D97-AF65-F5344CB8AC3E}">
+        <p14:creationId xmlns:p14="http://schemas.microsoft.com/office/powerpoint/2010/main" val="30208000"/>
       </p:ext>
     </p:extLst>
   </p:cSld>
